--- a/docs/figs/figs.pptx
+++ b/docs/figs/figs.pptx
@@ -6,8 +6,9 @@
   </p:sldMasterIdLst>
   <p:sldIdLst>
     <p:sldId id="256" r:id="rId2"/>
-    <p:sldId id="258" r:id="rId3"/>
-    <p:sldId id="257" r:id="rId4"/>
+    <p:sldId id="259" r:id="rId3"/>
+    <p:sldId id="258" r:id="rId4"/>
+    <p:sldId id="257" r:id="rId5"/>
   </p:sldIdLst>
   <p:sldSz cx="12192000" cy="6858000"/>
   <p:notesSz cx="6858000" cy="9144000"/>
@@ -263,7 +264,7 @@
           <a:p>
             <a:fld id="{87D7FCF5-B975-49B8-AF2B-BB874A83291F}" type="datetimeFigureOut">
               <a:rPr lang="en-NL" smtClean="0"/>
-              <a:t>11/06/2026</a:t>
+              <a:t>26/06/2026</a:t>
             </a:fld>
             <a:endParaRPr lang="en-NL"/>
           </a:p>
@@ -463,7 +464,7 @@
           <a:p>
             <a:fld id="{87D7FCF5-B975-49B8-AF2B-BB874A83291F}" type="datetimeFigureOut">
               <a:rPr lang="en-NL" smtClean="0"/>
-              <a:t>11/06/2026</a:t>
+              <a:t>26/06/2026</a:t>
             </a:fld>
             <a:endParaRPr lang="en-NL"/>
           </a:p>
@@ -673,7 +674,7 @@
           <a:p>
             <a:fld id="{87D7FCF5-B975-49B8-AF2B-BB874A83291F}" type="datetimeFigureOut">
               <a:rPr lang="en-NL" smtClean="0"/>
-              <a:t>11/06/2026</a:t>
+              <a:t>26/06/2026</a:t>
             </a:fld>
             <a:endParaRPr lang="en-NL"/>
           </a:p>
@@ -873,7 +874,7 @@
           <a:p>
             <a:fld id="{87D7FCF5-B975-49B8-AF2B-BB874A83291F}" type="datetimeFigureOut">
               <a:rPr lang="en-NL" smtClean="0"/>
-              <a:t>11/06/2026</a:t>
+              <a:t>26/06/2026</a:t>
             </a:fld>
             <a:endParaRPr lang="en-NL"/>
           </a:p>
@@ -1149,7 +1150,7 @@
           <a:p>
             <a:fld id="{87D7FCF5-B975-49B8-AF2B-BB874A83291F}" type="datetimeFigureOut">
               <a:rPr lang="en-NL" smtClean="0"/>
-              <a:t>11/06/2026</a:t>
+              <a:t>26/06/2026</a:t>
             </a:fld>
             <a:endParaRPr lang="en-NL"/>
           </a:p>
@@ -1417,7 +1418,7 @@
           <a:p>
             <a:fld id="{87D7FCF5-B975-49B8-AF2B-BB874A83291F}" type="datetimeFigureOut">
               <a:rPr lang="en-NL" smtClean="0"/>
-              <a:t>11/06/2026</a:t>
+              <a:t>26/06/2026</a:t>
             </a:fld>
             <a:endParaRPr lang="en-NL"/>
           </a:p>
@@ -1832,7 +1833,7 @@
           <a:p>
             <a:fld id="{87D7FCF5-B975-49B8-AF2B-BB874A83291F}" type="datetimeFigureOut">
               <a:rPr lang="en-NL" smtClean="0"/>
-              <a:t>11/06/2026</a:t>
+              <a:t>26/06/2026</a:t>
             </a:fld>
             <a:endParaRPr lang="en-NL"/>
           </a:p>
@@ -1974,7 +1975,7 @@
           <a:p>
             <a:fld id="{87D7FCF5-B975-49B8-AF2B-BB874A83291F}" type="datetimeFigureOut">
               <a:rPr lang="en-NL" smtClean="0"/>
-              <a:t>11/06/2026</a:t>
+              <a:t>26/06/2026</a:t>
             </a:fld>
             <a:endParaRPr lang="en-NL"/>
           </a:p>
@@ -2087,7 +2088,7 @@
           <a:p>
             <a:fld id="{87D7FCF5-B975-49B8-AF2B-BB874A83291F}" type="datetimeFigureOut">
               <a:rPr lang="en-NL" smtClean="0"/>
-              <a:t>11/06/2026</a:t>
+              <a:t>26/06/2026</a:t>
             </a:fld>
             <a:endParaRPr lang="en-NL"/>
           </a:p>
@@ -2400,7 +2401,7 @@
           <a:p>
             <a:fld id="{87D7FCF5-B975-49B8-AF2B-BB874A83291F}" type="datetimeFigureOut">
               <a:rPr lang="en-NL" smtClean="0"/>
-              <a:t>11/06/2026</a:t>
+              <a:t>26/06/2026</a:t>
             </a:fld>
             <a:endParaRPr lang="en-NL"/>
           </a:p>
@@ -2689,7 +2690,7 @@
           <a:p>
             <a:fld id="{87D7FCF5-B975-49B8-AF2B-BB874A83291F}" type="datetimeFigureOut">
               <a:rPr lang="en-NL" smtClean="0"/>
-              <a:t>11/06/2026</a:t>
+              <a:t>26/06/2026</a:t>
             </a:fld>
             <a:endParaRPr lang="en-NL"/>
           </a:p>
@@ -2932,7 +2933,7 @@
           <a:p>
             <a:fld id="{87D7FCF5-B975-49B8-AF2B-BB874A83291F}" type="datetimeFigureOut">
               <a:rPr lang="en-NL" smtClean="0"/>
-              <a:t>11/06/2026</a:t>
+              <a:t>26/06/2026</a:t>
             </a:fld>
             <a:endParaRPr lang="en-NL"/>
           </a:p>
@@ -3349,58 +3350,6 @@
           <a:chExt cx="0" cy="0"/>
         </a:xfrm>
       </p:grpSpPr>
-      <p:sp>
-        <p:nvSpPr>
-          <p:cNvPr id="48" name="Rectangle 47">
-            <a:extLst>
-              <a:ext uri="{FF2B5EF4-FFF2-40B4-BE49-F238E27FC236}">
-                <a16:creationId xmlns:a16="http://schemas.microsoft.com/office/drawing/2014/main" id="{684015ED-BF70-BC51-E635-1028CB07A1DC}"/>
-              </a:ext>
-            </a:extLst>
-          </p:cNvPr>
-          <p:cNvSpPr/>
-          <p:nvPr/>
-        </p:nvSpPr>
-        <p:spPr>
-          <a:xfrm>
-            <a:off x="1609423" y="500166"/>
-            <a:ext cx="8745101" cy="5133520"/>
-          </a:xfrm>
-          <a:prstGeom prst="rect">
-            <a:avLst/>
-          </a:prstGeom>
-          <a:solidFill>
-            <a:schemeClr val="bg1"/>
-          </a:solidFill>
-          <a:ln>
-            <a:noFill/>
-          </a:ln>
-        </p:spPr>
-        <p:style>
-          <a:lnRef idx="2">
-            <a:schemeClr val="accent1">
-              <a:shade val="15000"/>
-            </a:schemeClr>
-          </a:lnRef>
-          <a:fillRef idx="1">
-            <a:schemeClr val="accent1"/>
-          </a:fillRef>
-          <a:effectRef idx="0">
-            <a:schemeClr val="accent1"/>
-          </a:effectRef>
-          <a:fontRef idx="minor">
-            <a:schemeClr val="lt1"/>
-          </a:fontRef>
-        </p:style>
-        <p:txBody>
-          <a:bodyPr rtlCol="0" anchor="ctr"/>
-          <a:lstStyle/>
-          <a:p>
-            <a:pPr algn="ctr"/>
-            <a:endParaRPr lang="en-NL"/>
-          </a:p>
-        </p:txBody>
-      </p:sp>
       <p:pic>
         <p:nvPicPr>
           <p:cNvPr id="32" name="Picture 2" descr="Bot (informática) - EcuRed">
@@ -5082,6 +5031,390 @@
         <p:cNvPr id="1" name="">
           <a:extLst>
             <a:ext uri="{FF2B5EF4-FFF2-40B4-BE49-F238E27FC236}">
+              <a16:creationId xmlns:a16="http://schemas.microsoft.com/office/drawing/2014/main" id="{FEAE82D2-CE54-4D98-59B9-338E9DE897CE}"/>
+            </a:ext>
+          </a:extLst>
+        </p:cNvPr>
+        <p:cNvGrpSpPr/>
+        <p:nvPr/>
+      </p:nvGrpSpPr>
+      <p:grpSpPr>
+        <a:xfrm>
+          <a:off x="0" y="0"/>
+          <a:ext cx="0" cy="0"/>
+          <a:chOff x="0" y="0"/>
+          <a:chExt cx="0" cy="0"/>
+        </a:xfrm>
+      </p:grpSpPr>
+      <p:pic>
+        <p:nvPicPr>
+          <p:cNvPr id="32" name="Picture 2" descr="Bot (informática) - EcuRed">
+            <a:extLst>
+              <a:ext uri="{FF2B5EF4-FFF2-40B4-BE49-F238E27FC236}">
+                <a16:creationId xmlns:a16="http://schemas.microsoft.com/office/drawing/2014/main" id="{014D8569-0ED5-EF82-02B7-05A89389AE34}"/>
+              </a:ext>
+            </a:extLst>
+          </p:cNvPr>
+          <p:cNvPicPr>
+            <a:picLocks noChangeAspect="1" noChangeArrowheads="1"/>
+          </p:cNvPicPr>
+          <p:nvPr/>
+        </p:nvPicPr>
+        <p:blipFill rotWithShape="1">
+          <a:blip r:embed="rId2">
+            <a:clrChange>
+              <a:clrFrom>
+                <a:srgbClr val="FFFFFF"/>
+              </a:clrFrom>
+              <a:clrTo>
+                <a:srgbClr val="FFFFFF">
+                  <a:alpha val="0"/>
+                </a:srgbClr>
+              </a:clrTo>
+            </a:clrChange>
+            <a:duotone>
+              <a:srgbClr val="3C9BD5">
+                <a:shade val="45000"/>
+                <a:satMod val="135000"/>
+              </a:srgbClr>
+              <a:prstClr val="white"/>
+            </a:duotone>
+            <a:extLst>
+              <a:ext uri="{28A0092B-C50C-407E-A947-70E740481C1C}">
+                <a14:useLocalDpi xmlns:a14="http://schemas.microsoft.com/office/drawing/2010/main" val="0"/>
+              </a:ext>
+            </a:extLst>
+          </a:blip>
+          <a:srcRect l="18962" t="6530" r="16637" b="12432"/>
+          <a:stretch/>
+        </p:blipFill>
+        <p:spPr bwMode="auto">
+          <a:xfrm>
+            <a:off x="2374559" y="2151010"/>
+            <a:ext cx="1015621" cy="1277990"/>
+          </a:xfrm>
+          <a:prstGeom prst="rect">
+            <a:avLst/>
+          </a:prstGeom>
+          <a:noFill/>
+          <a:extLst>
+            <a:ext uri="{909E8E84-426E-40DD-AFC4-6F175D3DCCD1}">
+              <a14:hiddenFill xmlns:a14="http://schemas.microsoft.com/office/drawing/2010/main">
+                <a:solidFill>
+                  <a:srgbClr val="FFFFFF"/>
+                </a:solidFill>
+              </a14:hiddenFill>
+            </a:ext>
+          </a:extLst>
+        </p:spPr>
+      </p:pic>
+      <p:sp>
+        <p:nvSpPr>
+          <p:cNvPr id="38" name="Tekstvak 8">
+            <a:extLst>
+              <a:ext uri="{FF2B5EF4-FFF2-40B4-BE49-F238E27FC236}">
+                <a16:creationId xmlns:a16="http://schemas.microsoft.com/office/drawing/2014/main" id="{191FC2B6-693C-C44E-3ED4-D979240B51C8}"/>
+              </a:ext>
+            </a:extLst>
+          </p:cNvPr>
+          <p:cNvSpPr txBox="1"/>
+          <p:nvPr/>
+        </p:nvSpPr>
+        <p:spPr>
+          <a:xfrm>
+            <a:off x="2084041" y="3407195"/>
+            <a:ext cx="1596655" cy="923330"/>
+          </a:xfrm>
+          <a:prstGeom prst="rect">
+            <a:avLst/>
+          </a:prstGeom>
+          <a:noFill/>
+        </p:spPr>
+        <p:txBody>
+          <a:bodyPr wrap="square" rtlCol="0">
+            <a:spAutoFit/>
+          </a:bodyPr>
+          <a:lstStyle/>
+          <a:p>
+            <a:pPr algn="ctr" defTabSz="609630" eaLnBrk="0" fontAlgn="base" hangingPunct="0">
+              <a:spcBef>
+                <a:spcPct val="0"/>
+              </a:spcBef>
+              <a:spcAft>
+                <a:spcPct val="0"/>
+              </a:spcAft>
+              <a:defRPr/>
+            </a:pPr>
+            <a:r>
+              <a:rPr lang="en-US" dirty="0">
+                <a:solidFill>
+                  <a:srgbClr val="5E5E5E"/>
+                </a:solidFill>
+                <a:latin typeface="Trebuchet MS"/>
+                <a:ea typeface="MS PGothic" pitchFamily="34" charset="-128"/>
+                <a:cs typeface="Arial"/>
+                <a:sym typeface="Arial"/>
+              </a:rPr>
+              <a:t>Large Language Models</a:t>
+            </a:r>
+            <a:endParaRPr lang="nl-NL" dirty="0">
+              <a:solidFill>
+                <a:srgbClr val="5E5E5E"/>
+              </a:solidFill>
+              <a:latin typeface="Trebuchet MS"/>
+              <a:ea typeface="MS PGothic" pitchFamily="34" charset="-128"/>
+              <a:cs typeface="Arial"/>
+              <a:sym typeface="Arial"/>
+            </a:endParaRPr>
+          </a:p>
+        </p:txBody>
+      </p:sp>
+      <p:sp>
+        <p:nvSpPr>
+          <p:cNvPr id="49" name="Tekstvak 8">
+            <a:extLst>
+              <a:ext uri="{FF2B5EF4-FFF2-40B4-BE49-F238E27FC236}">
+                <a16:creationId xmlns:a16="http://schemas.microsoft.com/office/drawing/2014/main" id="{B4827B24-58EB-9983-CC02-EE51B7A201DE}"/>
+              </a:ext>
+            </a:extLst>
+          </p:cNvPr>
+          <p:cNvSpPr txBox="1"/>
+          <p:nvPr/>
+        </p:nvSpPr>
+        <p:spPr>
+          <a:xfrm>
+            <a:off x="3215743" y="500166"/>
+            <a:ext cx="4876144" cy="369332"/>
+          </a:xfrm>
+          <a:prstGeom prst="rect">
+            <a:avLst/>
+          </a:prstGeom>
+          <a:noFill/>
+        </p:spPr>
+        <p:txBody>
+          <a:bodyPr wrap="square" rtlCol="0">
+            <a:spAutoFit/>
+          </a:bodyPr>
+          <a:lstStyle/>
+          <a:p>
+            <a:pPr algn="ctr" defTabSz="609630" eaLnBrk="0" fontAlgn="base" hangingPunct="0">
+              <a:spcBef>
+                <a:spcPct val="0"/>
+              </a:spcBef>
+              <a:spcAft>
+                <a:spcPct val="0"/>
+              </a:spcAft>
+              <a:defRPr/>
+            </a:pPr>
+            <a:r>
+              <a:rPr lang="en-US" dirty="0">
+                <a:solidFill>
+                  <a:srgbClr val="5E5E5E"/>
+                </a:solidFill>
+                <a:latin typeface="Trebuchet MS"/>
+                <a:ea typeface="MS PGothic" pitchFamily="34" charset="-128"/>
+                <a:cs typeface="Arial"/>
+                <a:sym typeface="Arial"/>
+              </a:rPr>
+              <a:t>LLMs vs Bayesian</a:t>
+            </a:r>
+            <a:endParaRPr lang="nl-NL" dirty="0">
+              <a:solidFill>
+                <a:srgbClr val="5E5E5E"/>
+              </a:solidFill>
+              <a:latin typeface="Trebuchet MS"/>
+              <a:ea typeface="MS PGothic" pitchFamily="34" charset="-128"/>
+              <a:cs typeface="Arial"/>
+              <a:sym typeface="Arial"/>
+            </a:endParaRPr>
+          </a:p>
+        </p:txBody>
+      </p:sp>
+      <p:pic>
+        <p:nvPicPr>
+          <p:cNvPr id="2" name="Picture 1" descr="Bayesian Probability Concept">
+            <a:extLst>
+              <a:ext uri="{FF2B5EF4-FFF2-40B4-BE49-F238E27FC236}">
+                <a16:creationId xmlns:a16="http://schemas.microsoft.com/office/drawing/2014/main" id="{82BFD65B-371B-7A45-E027-81FCAEC47D5E}"/>
+              </a:ext>
+            </a:extLst>
+          </p:cNvPr>
+          <p:cNvPicPr>
+            <a:picLocks noChangeAspect="1"/>
+          </p:cNvPicPr>
+          <p:nvPr/>
+        </p:nvPicPr>
+        <p:blipFill>
+          <a:blip r:embed="rId3"/>
+          <a:stretch>
+            <a:fillRect/>
+          </a:stretch>
+        </p:blipFill>
+        <p:spPr>
+          <a:xfrm>
+            <a:off x="6957435" y="1123471"/>
+            <a:ext cx="3487589" cy="3619853"/>
+          </a:xfrm>
+          <a:prstGeom prst="rect">
+            <a:avLst/>
+          </a:prstGeom>
+        </p:spPr>
+      </p:pic>
+    </p:spTree>
+    <p:extLst>
+      <p:ext uri="{BB962C8B-B14F-4D97-AF65-F5344CB8AC3E}">
+        <p14:creationId xmlns:p14="http://schemas.microsoft.com/office/powerpoint/2010/main" val="2014557336"/>
+      </p:ext>
+    </p:extLst>
+  </p:cSld>
+  <p:clrMapOvr>
+    <a:masterClrMapping/>
+  </p:clrMapOvr>
+  <p:timing>
+    <p:tnLst>
+      <p:par>
+        <p:cTn id="1" dur="indefinite" restart="never" nodeType="tmRoot">
+          <p:childTnLst>
+            <p:seq concurrent="1" nextAc="seek">
+              <p:cTn id="2" dur="indefinite" nodeType="mainSeq">
+                <p:childTnLst>
+                  <p:par>
+                    <p:cTn id="3" fill="hold">
+                      <p:stCondLst>
+                        <p:cond delay="indefinite"/>
+                        <p:cond evt="onBegin" delay="0">
+                          <p:tn val="2"/>
+                        </p:cond>
+                      </p:stCondLst>
+                      <p:childTnLst>
+                        <p:par>
+                          <p:cTn id="4" fill="hold">
+                            <p:stCondLst>
+                              <p:cond delay="0"/>
+                            </p:stCondLst>
+                            <p:childTnLst>
+                              <p:par>
+                                <p:cTn id="5" presetID="10" presetClass="entr" presetSubtype="0" fill="hold" grpId="0" nodeType="afterEffect">
+                                  <p:stCondLst>
+                                    <p:cond delay="0"/>
+                                  </p:stCondLst>
+                                  <p:childTnLst>
+                                    <p:set>
+                                      <p:cBhvr>
+                                        <p:cTn id="6" dur="1" fill="hold">
+                                          <p:stCondLst>
+                                            <p:cond delay="0"/>
+                                          </p:stCondLst>
+                                        </p:cTn>
+                                        <p:tgtEl>
+                                          <p:spTgt spid="38"/>
+                                        </p:tgtEl>
+                                        <p:attrNameLst>
+                                          <p:attrName>style.visibility</p:attrName>
+                                        </p:attrNameLst>
+                                      </p:cBhvr>
+                                      <p:to>
+                                        <p:strVal val="visible"/>
+                                      </p:to>
+                                    </p:set>
+                                    <p:animEffect transition="in" filter="fade">
+                                      <p:cBhvr>
+                                        <p:cTn id="7" dur="500"/>
+                                        <p:tgtEl>
+                                          <p:spTgt spid="38"/>
+                                        </p:tgtEl>
+                                      </p:cBhvr>
+                                    </p:animEffect>
+                                  </p:childTnLst>
+                                </p:cTn>
+                              </p:par>
+                            </p:childTnLst>
+                          </p:cTn>
+                        </p:par>
+                        <p:par>
+                          <p:cTn id="8" fill="hold">
+                            <p:stCondLst>
+                              <p:cond delay="500"/>
+                            </p:stCondLst>
+                            <p:childTnLst>
+                              <p:par>
+                                <p:cTn id="9" presetID="10" presetClass="entr" presetSubtype="0" fill="hold" grpId="0" nodeType="afterEffect">
+                                  <p:stCondLst>
+                                    <p:cond delay="0"/>
+                                  </p:stCondLst>
+                                  <p:childTnLst>
+                                    <p:set>
+                                      <p:cBhvr>
+                                        <p:cTn id="10" dur="1" fill="hold">
+                                          <p:stCondLst>
+                                            <p:cond delay="0"/>
+                                          </p:stCondLst>
+                                        </p:cTn>
+                                        <p:tgtEl>
+                                          <p:spTgt spid="49"/>
+                                        </p:tgtEl>
+                                        <p:attrNameLst>
+                                          <p:attrName>style.visibility</p:attrName>
+                                        </p:attrNameLst>
+                                      </p:cBhvr>
+                                      <p:to>
+                                        <p:strVal val="visible"/>
+                                      </p:to>
+                                    </p:set>
+                                    <p:animEffect transition="in" filter="fade">
+                                      <p:cBhvr>
+                                        <p:cTn id="11" dur="500"/>
+                                        <p:tgtEl>
+                                          <p:spTgt spid="49"/>
+                                        </p:tgtEl>
+                                      </p:cBhvr>
+                                    </p:animEffect>
+                                  </p:childTnLst>
+                                </p:cTn>
+                              </p:par>
+                            </p:childTnLst>
+                          </p:cTn>
+                        </p:par>
+                      </p:childTnLst>
+                    </p:cTn>
+                  </p:par>
+                </p:childTnLst>
+              </p:cTn>
+              <p:prevCondLst>
+                <p:cond evt="onPrev" delay="0">
+                  <p:tgtEl>
+                    <p:sldTgt/>
+                  </p:tgtEl>
+                </p:cond>
+              </p:prevCondLst>
+              <p:nextCondLst>
+                <p:cond evt="onNext" delay="0">
+                  <p:tgtEl>
+                    <p:sldTgt/>
+                  </p:tgtEl>
+                </p:cond>
+              </p:nextCondLst>
+            </p:seq>
+          </p:childTnLst>
+        </p:cTn>
+      </p:par>
+    </p:tnLst>
+    <p:bldLst>
+      <p:bldP spid="38" grpId="0"/>
+      <p:bldP spid="49" grpId="0"/>
+    </p:bldLst>
+  </p:timing>
+</p:sld>
+</file>
+
+<file path=ppt/slides/slide3.xml><?xml version="1.0" encoding="utf-8"?>
+<p:sld xmlns:a="http://schemas.openxmlformats.org/drawingml/2006/main" xmlns:r="http://schemas.openxmlformats.org/officeDocument/2006/relationships" xmlns:p="http://schemas.openxmlformats.org/presentationml/2006/main">
+  <p:cSld>
+    <p:spTree>
+      <p:nvGrpSpPr>
+        <p:cNvPr id="1" name="">
+          <a:extLst>
+            <a:ext uri="{FF2B5EF4-FFF2-40B4-BE49-F238E27FC236}">
               <a16:creationId xmlns:a16="http://schemas.microsoft.com/office/drawing/2014/main" id="{2E7F94F8-1F8D-FA00-7244-84E53FD50312}"/>
             </a:ext>
           </a:extLst>
@@ -7429,7 +7762,7 @@
 </p:sld>
 </file>
 
-<file path=ppt/slides/slide3.xml><?xml version="1.0" encoding="utf-8"?>
+<file path=ppt/slides/slide4.xml><?xml version="1.0" encoding="utf-8"?>
 <p:sld xmlns:a="http://schemas.openxmlformats.org/drawingml/2006/main" xmlns:r="http://schemas.openxmlformats.org/officeDocument/2006/relationships" xmlns:p="http://schemas.openxmlformats.org/presentationml/2006/main">
   <p:cSld>
     <p:spTree>
